--- a/dataset/guides_final/ACS/manual/IT-ACS-001-M_사내 시스템 접근권한 처리 매뉴얼.pptx
+++ b/dataset/guides_final/ACS/manual/IT-ACS-001-M_사내 시스템 접근권한 처리 매뉴얼.pptx
@@ -27273,7 +27273,7 @@
                 <a:ea typeface="Malgun Gothic"/>
                 <a:cs typeface="Malgun Gothic"/>
               </a:rPr>
-              <a:t>티켓: 담당자 조치가 필요한 건. 담당 팀에 배정하고 상태를 RDY → IP → FIN → CLS 로 관리한다. FIN은 담당자 처리 완료, CLS는 문의자가 해결을 확인한 최종</a:t>
+              <a:t>티켓: 담당자 조치가 필요한 건. 담당 팀에 배정하고 상태를 RDY → WIP → FIN → CLS 로 관리한다. FIN은 담당자 처리 완료, CLS는 문의자가 해결을 확인한 최종</a:t>
             </a:r>
           </a:p>
           <a:p>

--- a/dataset/guides_final/ACS/manual/IT-ACS-001-M_사내 시스템 접근권한 처리 매뉴얼.pptx
+++ b/dataset/guides_final/ACS/manual/IT-ACS-001-M_사내 시스템 접근권한 처리 매뉴얼.pptx
@@ -3235,7 +3235,7 @@
                 <a:ea typeface="Malgun Gothic"/>
                 <a:cs typeface="Malgun Gothic"/>
               </a:rPr>
-              <a:t>한화시스템 ICT IT 담당자 매뉴얼 · 접근권한</a:t>
+              <a:t>가상 ICT 기업 IT 담당자 매뉴얼 · 접근권한</a:t>
             </a:r>
           </a:p>
         </p:txBody>
@@ -3514,7 +3514,7 @@
                 <a:ea typeface="Malgun Gothic"/>
                 <a:cs typeface="Malgun Gothic"/>
               </a:rPr>
-              <a:t>© HANWHA SYSTEMS ICT · IT-ACS-001-M · 사내 제한</a:t>
+              <a:t>© 가상 ICT 기업 · IT-ACS-001-M · 사내 제한</a:t>
             </a:r>
           </a:p>
         </p:txBody>
@@ -5158,7 +5158,7 @@
                 <a:ea typeface="Malgun Gothic"/>
                 <a:cs typeface="Malgun Gothic"/>
               </a:rPr>
-              <a:t>© HANWHA SYSTEMS ICT · IT-ACS-001-M · 사내 제한</a:t>
+              <a:t>© 가상 ICT 기업 · IT-ACS-001-M · 사내 제한</a:t>
             </a:r>
           </a:p>
         </p:txBody>
@@ -8262,7 +8262,7 @@
                 <a:ea typeface="Malgun Gothic"/>
                 <a:cs typeface="Malgun Gothic"/>
               </a:rPr>
-              <a:t>© HANWHA SYSTEMS ICT · IT-ACS-001-M · 사내 제한</a:t>
+              <a:t>© 가상 ICT 기업 · IT-ACS-001-M · 사내 제한</a:t>
             </a:r>
           </a:p>
         </p:txBody>
@@ -11194,7 +11194,7 @@
                 <a:ea typeface="Malgun Gothic"/>
                 <a:cs typeface="Malgun Gothic"/>
               </a:rPr>
-              <a:t>© HANWHA SYSTEMS ICT · IT-ACS-001-M · 사내 제한</a:t>
+              <a:t>© 가상 ICT 기업 · IT-ACS-001-M · 사내 제한</a:t>
             </a:r>
           </a:p>
         </p:txBody>
@@ -12119,7 +12119,7 @@
                 <a:ea typeface="Malgun Gothic"/>
                 <a:cs typeface="Malgun Gothic"/>
               </a:rPr>
-              <a:t>© HANWHA SYSTEMS ICT · IT-ACS-001-M · 사내 제한</a:t>
+              <a:t>© 가상 ICT 기업 · IT-ACS-001-M · 사내 제한</a:t>
             </a:r>
           </a:p>
         </p:txBody>
@@ -14793,7 +14793,7 @@
                 <a:ea typeface="Malgun Gothic"/>
                 <a:cs typeface="Malgun Gothic"/>
               </a:rPr>
-              <a:t>© HANWHA SYSTEMS ICT · IT-ACS-001-M · 사내 제한</a:t>
+              <a:t>© 가상 ICT 기업 · IT-ACS-001-M · 사내 제한</a:t>
             </a:r>
           </a:p>
         </p:txBody>
@@ -15718,7 +15718,7 @@
                 <a:ea typeface="Malgun Gothic"/>
                 <a:cs typeface="Malgun Gothic"/>
               </a:rPr>
-              <a:t>© HANWHA SYSTEMS ICT · IT-ACS-001-M · 사내 제한</a:t>
+              <a:t>© 가상 ICT 기업 · IT-ACS-001-M · 사내 제한</a:t>
             </a:r>
           </a:p>
         </p:txBody>
@@ -15966,7 +15966,7 @@
                 <a:ea typeface="Malgun Gothic"/>
                 <a:cs typeface="Malgun Gothic"/>
               </a:rPr>
-              <a:t>© HANWHA SYSTEMS ICT · IT-ACS-001-M · 사내 제한</a:t>
+              <a:t>© 가상 ICT 기업 · IT-ACS-001-M · 사내 제한</a:t>
             </a:r>
           </a:p>
         </p:txBody>
@@ -16625,7 +16625,7 @@
                 <a:ea typeface="Malgun Gothic"/>
                 <a:cs typeface="Malgun Gothic"/>
               </a:rPr>
-              <a:t>© HANWHA SYSTEMS ICT · IT-ACS-001-M · 사내 제한</a:t>
+              <a:t>© 가상 ICT 기업 · IT-ACS-001-M · 사내 제한</a:t>
             </a:r>
           </a:p>
         </p:txBody>
@@ -16873,7 +16873,7 @@
                 <a:ea typeface="Malgun Gothic"/>
                 <a:cs typeface="Malgun Gothic"/>
               </a:rPr>
-              <a:t>© HANWHA SYSTEMS ICT · IT-ACS-001-M · 사내 제한</a:t>
+              <a:t>© 가상 ICT 기업 · IT-ACS-001-M · 사내 제한</a:t>
             </a:r>
           </a:p>
         </p:txBody>
@@ -17901,7 +17901,7 @@
                 <a:ea typeface="Malgun Gothic"/>
                 <a:cs typeface="Malgun Gothic"/>
               </a:rPr>
-              <a:t>© HANWHA SYSTEMS ICT · IT-ACS-001-M · 사내 제한</a:t>
+              <a:t>© 가상 ICT 기업 · IT-ACS-001-M · 사내 제한</a:t>
             </a:r>
           </a:p>
         </p:txBody>
@@ -19544,7 +19544,7 @@
                 <a:ea typeface="Malgun Gothic"/>
                 <a:cs typeface="Malgun Gothic"/>
               </a:rPr>
-              <a:t>© HANWHA SYSTEMS ICT · IT-ACS-001-M · 사내 제한</a:t>
+              <a:t>© 가상 ICT 기업 · IT-ACS-001-M · 사내 제한</a:t>
             </a:r>
           </a:p>
         </p:txBody>
@@ -19792,7 +19792,7 @@
                 <a:ea typeface="Malgun Gothic"/>
                 <a:cs typeface="Malgun Gothic"/>
               </a:rPr>
-              <a:t>© HANWHA SYSTEMS ICT · IT-ACS-001-M · 사내 제한</a:t>
+              <a:t>© 가상 ICT 기업 · IT-ACS-001-M · 사내 제한</a:t>
             </a:r>
           </a:p>
         </p:txBody>
@@ -21271,7 +21271,7 @@
                 <a:ea typeface="Malgun Gothic"/>
                 <a:cs typeface="Malgun Gothic"/>
               </a:rPr>
-              <a:t>© HANWHA SYSTEMS ICT · IT-ACS-001-M · 사내 제한</a:t>
+              <a:t>© 가상 ICT 기업 · IT-ACS-001-M · 사내 제한</a:t>
             </a:r>
           </a:p>
         </p:txBody>
@@ -22201,7 +22201,7 @@
                 <a:ea typeface="Malgun Gothic"/>
                 <a:cs typeface="Malgun Gothic"/>
               </a:rPr>
-              <a:t>© HANWHA SYSTEMS ICT · IT-ACS-001-M · 사내 제한</a:t>
+              <a:t>© 가상 ICT 기업 · IT-ACS-001-M · 사내 제한</a:t>
             </a:r>
           </a:p>
         </p:txBody>
@@ -23347,7 +23347,7 @@
                 <a:ea typeface="Malgun Gothic"/>
                 <a:cs typeface="Malgun Gothic"/>
               </a:rPr>
-              <a:t>© HANWHA SYSTEMS ICT · IT-ACS-001-M · 사내 제한</a:t>
+              <a:t>© 가상 ICT 기업 · IT-ACS-001-M · 사내 제한</a:t>
             </a:r>
           </a:p>
         </p:txBody>
@@ -23595,7 +23595,7 @@
                 <a:ea typeface="Malgun Gothic"/>
                 <a:cs typeface="Malgun Gothic"/>
               </a:rPr>
-              <a:t>© HANWHA SYSTEMS ICT · IT-ACS-001-M · 사내 제한</a:t>
+              <a:t>© 가상 ICT 기업 · IT-ACS-001-M · 사내 제한</a:t>
             </a:r>
           </a:p>
         </p:txBody>
@@ -24493,7 +24493,7 @@
                 <a:ea typeface="Malgun Gothic"/>
                 <a:cs typeface="Malgun Gothic"/>
               </a:rPr>
-              <a:t>© HANWHA SYSTEMS ICT · IT-ACS-001-M · 사내 제한</a:t>
+              <a:t>© 가상 ICT 기업 · IT-ACS-001-M · 사내 제한</a:t>
             </a:r>
           </a:p>
         </p:txBody>
@@ -24741,7 +24741,7 @@
                 <a:ea typeface="Malgun Gothic"/>
                 <a:cs typeface="Malgun Gothic"/>
               </a:rPr>
-              <a:t>© HANWHA SYSTEMS ICT · IT-ACS-001-M · 사내 제한</a:t>
+              <a:t>© 가상 ICT 기업 · IT-ACS-001-M · 사내 제한</a:t>
             </a:r>
           </a:p>
         </p:txBody>
@@ -27673,7 +27673,7 @@
                 <a:ea typeface="Malgun Gothic"/>
                 <a:cs typeface="Malgun Gothic"/>
               </a:rPr>
-              <a:t>© HANWHA SYSTEMS ICT · IT-ACS-001-M · 사내 제한</a:t>
+              <a:t>© 가상 ICT 기업 · IT-ACS-001-M · 사내 제한</a:t>
             </a:r>
           </a:p>
         </p:txBody>
@@ -27921,7 +27921,7 @@
                 <a:ea typeface="Malgun Gothic"/>
                 <a:cs typeface="Malgun Gothic"/>
               </a:rPr>
-              <a:t>© HANWHA SYSTEMS ICT · IT-ACS-001-M · 사내 제한</a:t>
+              <a:t>© 가상 ICT 기업 · IT-ACS-001-M · 사내 제한</a:t>
             </a:r>
           </a:p>
         </p:txBody>
@@ -30509,7 +30509,7 @@
                 <a:ea typeface="Malgun Gothic"/>
                 <a:cs typeface="Malgun Gothic"/>
               </a:rPr>
-              <a:t>© HANWHA SYSTEMS ICT · IT-ACS-001-M · 사내 제한</a:t>
+              <a:t>© 가상 ICT 기업 · IT-ACS-001-M · 사내 제한</a:t>
             </a:r>
           </a:p>
         </p:txBody>
